--- a/论文图片/图片转pdf/第三章/融合扫视时序特征的多维感知注视点渲染方法总体架构图.pptx
+++ b/论文图片/图片转pdf/第三章/融合扫视时序特征的多维感知注视点渲染方法总体架构图.pptx
@@ -115,7 +115,7 @@
             <a:srgbClr val="A4A3A4"/>
           </p15:clr>
         </p15:guide>
-        <p15:guide id="2" pos="3937" userDrawn="1">
+        <p15:guide id="2" pos="3904" userDrawn="1">
           <p15:clr>
             <a:srgbClr val="A4A3A4"/>
           </p15:clr>
@@ -3336,7 +3336,7 @@
         </p:nvSpPr>
         <p:spPr>
           <a:xfrm>
-            <a:off x="8192770" y="645160"/>
+            <a:off x="8253730" y="645160"/>
             <a:ext cx="3939540" cy="5368925"/>
           </a:xfrm>
           <a:prstGeom prst="rect">
@@ -3383,8 +3383,8 @@
         </p:nvSpPr>
         <p:spPr>
           <a:xfrm>
-            <a:off x="4555490" y="645160"/>
-            <a:ext cx="3289935" cy="5368925"/>
+            <a:off x="4502150" y="645160"/>
+            <a:ext cx="3455035" cy="5368925"/>
           </a:xfrm>
           <a:prstGeom prst="rect">
             <a:avLst/>
@@ -3430,7 +3430,7 @@
         </p:nvSpPr>
         <p:spPr>
           <a:xfrm>
-            <a:off x="106045" y="645160"/>
+            <a:off x="52705" y="645160"/>
             <a:ext cx="3939540" cy="5368925"/>
           </a:xfrm>
           <a:prstGeom prst="rect">
@@ -3485,7 +3485,7 @@
         </p:blipFill>
         <p:spPr>
           <a:xfrm>
-            <a:off x="125730" y="1047115"/>
+            <a:off x="72390" y="1047115"/>
             <a:ext cx="751205" cy="447675"/>
           </a:xfrm>
           <a:prstGeom prst="rect">
@@ -3509,7 +3509,7 @@
         </p:blipFill>
         <p:spPr>
           <a:xfrm>
-            <a:off x="895985" y="868680"/>
+            <a:off x="842645" y="868680"/>
             <a:ext cx="744855" cy="325755"/>
           </a:xfrm>
           <a:prstGeom prst="rect">
@@ -3525,7 +3525,7 @@
         </p:nvCxnSpPr>
         <p:spPr>
           <a:xfrm flipV="1">
-            <a:off x="904875" y="1276350"/>
+            <a:off x="851535" y="1276350"/>
             <a:ext cx="725170" cy="8890"/>
           </a:xfrm>
           <a:prstGeom prst="straightConnector1">
@@ -3562,7 +3562,7 @@
         </p:nvSpPr>
         <p:spPr>
           <a:xfrm>
-            <a:off x="106045" y="81280"/>
+            <a:off x="52705" y="81280"/>
             <a:ext cx="3939540" cy="563880"/>
           </a:xfrm>
           <a:prstGeom prst="rect">
@@ -3598,27 +3598,16 @@
           <a:p>
             <a:pPr algn="ctr"/>
             <a:r>
-              <a:rPr lang="en-US" altLang="zh-CN" sz="1605" b="1">
-                <a:solidFill>
-                  <a:schemeClr val="tx1"/>
-                </a:solidFill>
-                <a:latin typeface="Times New Roman" panose="02020603050405020304" charset="0"/>
-                <a:ea typeface="宋体" panose="02010600030101010101" pitchFamily="2" charset="-122"/>
-                <a:cs typeface="Times New Roman" panose="02020603050405020304" charset="0"/>
-              </a:rPr>
-              <a:t>Step1:</a:t>
-            </a:r>
-            <a:r>
-              <a:rPr lang="zh-CN" altLang="en-US" sz="1605" b="1">
+              <a:rPr lang="zh-CN" altLang="en-US" sz="1500" b="1">
                 <a:solidFill>
                   <a:schemeClr val="tx1"/>
                 </a:solidFill>
                 <a:latin typeface="宋体" panose="02010600030101010101" pitchFamily="2" charset="-122"/>
                 <a:ea typeface="宋体" panose="02010600030101010101" pitchFamily="2" charset="-122"/>
               </a:rPr>
-              <a:t>眼动时序优化窗口划分与识别模块</a:t>
-            </a:r>
-            <a:endParaRPr lang="zh-CN" altLang="en-US" sz="1605" b="1">
+              <a:t>眼动时序优化窗口划分与识别</a:t>
+            </a:r>
+            <a:endParaRPr lang="zh-CN" altLang="en-US" sz="1500" b="1">
               <a:solidFill>
                 <a:schemeClr val="tx1"/>
               </a:solidFill>
@@ -3636,8 +3625,8 @@
         </p:nvSpPr>
         <p:spPr>
           <a:xfrm>
-            <a:off x="4555490" y="81280"/>
-            <a:ext cx="3290570" cy="563880"/>
+            <a:off x="4502150" y="81280"/>
+            <a:ext cx="3455035" cy="563880"/>
           </a:xfrm>
           <a:prstGeom prst="rect">
             <a:avLst/>
@@ -3672,29 +3661,7 @@
           <a:p>
             <a:pPr algn="ctr"/>
             <a:r>
-              <a:rPr lang="en-US" altLang="zh-CN" sz="1605" b="1">
-                <a:solidFill>
-                  <a:schemeClr val="tx1"/>
-                </a:solidFill>
-                <a:latin typeface="Times New Roman" panose="02020603050405020304" charset="0"/>
-                <a:ea typeface="宋体" panose="02010600030101010101" pitchFamily="2" charset="-122"/>
-                <a:cs typeface="Times New Roman" panose="02020603050405020304" charset="0"/>
-              </a:rPr>
-              <a:t>Step2</a:t>
-            </a:r>
-            <a:r>
-              <a:rPr lang="zh-CN" altLang="en-US" sz="1605" b="1">
-                <a:solidFill>
-                  <a:schemeClr val="tx1"/>
-                </a:solidFill>
-                <a:latin typeface="Times New Roman" panose="02020603050405020304" charset="0"/>
-                <a:ea typeface="宋体" panose="02010600030101010101" pitchFamily="2" charset="-122"/>
-                <a:cs typeface="Times New Roman" panose="02020603050405020304" charset="0"/>
-              </a:rPr>
-              <a:t>：</a:t>
-            </a:r>
-            <a:r>
-              <a:rPr lang="zh-CN" altLang="en-US" sz="1605" b="1">
+              <a:rPr lang="zh-CN" altLang="en-US" sz="1500" b="1">
                 <a:solidFill>
                   <a:schemeClr val="tx1"/>
                 </a:solidFill>
@@ -3702,9 +3669,9 @@
                 <a:ea typeface="宋体" panose="02010600030101010101" pitchFamily="2" charset="-122"/>
                 <a:cs typeface="宋体" panose="02010600030101010101" pitchFamily="2" charset="-122"/>
               </a:rPr>
-              <a:t>视觉感知建模模块</a:t>
-            </a:r>
-            <a:endParaRPr lang="zh-CN" altLang="en-US" sz="1605" b="1">
+              <a:t>融合扫视时序特征的多维视觉感知模型</a:t>
+            </a:r>
+            <a:endParaRPr lang="zh-CN" altLang="en-US" sz="1500" b="1">
               <a:solidFill>
                 <a:schemeClr val="tx1"/>
               </a:solidFill>
@@ -3723,7 +3690,7 @@
         </p:nvSpPr>
         <p:spPr>
           <a:xfrm>
-            <a:off x="8192770" y="81280"/>
+            <a:off x="8253730" y="81280"/>
             <a:ext cx="3939540" cy="563880"/>
           </a:xfrm>
           <a:prstGeom prst="rect">
@@ -3759,7 +3726,7 @@
           <a:p>
             <a:pPr algn="ctr"/>
             <a:r>
-              <a:rPr lang="en-US" altLang="zh-CN" sz="1605" b="1">
+              <a:rPr lang="zh-CN" altLang="en-US" sz="1500" b="1">
                 <a:solidFill>
                   <a:schemeClr val="tx1"/>
                 </a:solidFill>
@@ -3768,21 +3735,9 @@
                 <a:cs typeface="Times New Roman" panose="02020603050405020304" charset="0"/>
                 <a:sym typeface="+mn-ea"/>
               </a:rPr>
-              <a:t>Step3</a:t>
-            </a:r>
-            <a:r>
-              <a:rPr lang="zh-CN" altLang="en-US" sz="1605" b="1">
-                <a:solidFill>
-                  <a:schemeClr val="tx1"/>
-                </a:solidFill>
-                <a:latin typeface="Times New Roman" panose="02020603050405020304" charset="0"/>
-                <a:ea typeface="宋体" panose="02010600030101010101" pitchFamily="2" charset="-122"/>
-                <a:cs typeface="Times New Roman" panose="02020603050405020304" charset="0"/>
-                <a:sym typeface="+mn-ea"/>
-              </a:rPr>
-              <a:t>：动态分辨率渲染执行模块</a:t>
-            </a:r>
-            <a:endParaRPr lang="zh-CN" altLang="en-US" sz="1605"/>
+              <a:t>感知自适应的动态分辨率渲染</a:t>
+            </a:r>
+            <a:endParaRPr lang="zh-CN" altLang="en-US" sz="1500"/>
           </a:p>
         </p:txBody>
       </p:sp>
@@ -3794,7 +3749,7 @@
         </p:nvSpPr>
         <p:spPr>
           <a:xfrm>
-            <a:off x="1638935" y="832485"/>
+            <a:off x="1585595" y="832485"/>
             <a:ext cx="2296160" cy="894080"/>
           </a:xfrm>
           <a:prstGeom prst="rect">
@@ -3834,7 +3789,7 @@
         </p:nvSpPr>
         <p:spPr>
           <a:xfrm>
-            <a:off x="2052955" y="841375"/>
+            <a:off x="1999615" y="841375"/>
             <a:ext cx="1564640" cy="307975"/>
           </a:xfrm>
           <a:prstGeom prst="rect">
@@ -3877,7 +3832,7 @@
         </p:nvSpPr>
         <p:spPr>
           <a:xfrm>
-            <a:off x="1718310" y="1194435"/>
+            <a:off x="1664970" y="1194435"/>
             <a:ext cx="1014095" cy="467995"/>
           </a:xfrm>
           <a:prstGeom prst="roundRect">
@@ -3932,7 +3887,7 @@
         </p:nvSpPr>
         <p:spPr>
           <a:xfrm>
-            <a:off x="2850515" y="1184910"/>
+            <a:off x="2797175" y="1184910"/>
             <a:ext cx="1014095" cy="467995"/>
           </a:xfrm>
           <a:prstGeom prst="roundRect">
@@ -3987,7 +3942,7 @@
         </p:nvSpPr>
         <p:spPr>
           <a:xfrm>
-            <a:off x="400685" y="1866900"/>
+            <a:off x="347345" y="1866900"/>
             <a:ext cx="1270000" cy="307975"/>
           </a:xfrm>
           <a:prstGeom prst="rect">
@@ -4025,7 +3980,7 @@
         </p:nvSpPr>
         <p:spPr>
           <a:xfrm>
-            <a:off x="302895" y="2416175"/>
+            <a:off x="249555" y="2416175"/>
             <a:ext cx="3671570" cy="3470910"/>
           </a:xfrm>
           <a:prstGeom prst="rect">
@@ -4069,7 +4024,7 @@
         </p:nvSpPr>
         <p:spPr>
           <a:xfrm>
-            <a:off x="1073785" y="2534285"/>
+            <a:off x="1020445" y="2534285"/>
             <a:ext cx="2003425" cy="307975"/>
           </a:xfrm>
           <a:prstGeom prst="rect">
@@ -4112,7 +4067,7 @@
         </p:nvSpPr>
         <p:spPr>
           <a:xfrm>
-            <a:off x="-37465" y="688340"/>
+            <a:off x="-90805" y="688340"/>
             <a:ext cx="1466215" cy="340995"/>
           </a:xfrm>
           <a:prstGeom prst="rect">
@@ -4150,7 +4105,7 @@
         </p:nvSpPr>
         <p:spPr>
           <a:xfrm>
-            <a:off x="765175" y="3500120"/>
+            <a:off x="711835" y="3500120"/>
             <a:ext cx="953135" cy="467995"/>
           </a:xfrm>
           <a:prstGeom prst="roundRect">
@@ -4219,7 +4174,7 @@
         </p:nvSpPr>
         <p:spPr>
           <a:xfrm>
-            <a:off x="2167890" y="3012440"/>
+            <a:off x="2114550" y="3012440"/>
             <a:ext cx="1731645" cy="2690495"/>
           </a:xfrm>
           <a:prstGeom prst="roundRect">
@@ -4261,7 +4216,7 @@
         </p:nvSpPr>
         <p:spPr>
           <a:xfrm>
-            <a:off x="2548255" y="3331210"/>
+            <a:off x="2494915" y="3331210"/>
             <a:ext cx="1182370" cy="454660"/>
           </a:xfrm>
           <a:prstGeom prst="roundRect">
@@ -4315,7 +4270,7 @@
         </p:nvSpPr>
         <p:spPr>
           <a:xfrm>
-            <a:off x="2548255" y="4225290"/>
+            <a:off x="2494915" y="4225290"/>
             <a:ext cx="1182370" cy="454660"/>
           </a:xfrm>
           <a:prstGeom prst="roundRect">
@@ -4369,7 +4324,7 @@
         </p:nvSpPr>
         <p:spPr>
           <a:xfrm>
-            <a:off x="2548255" y="5069840"/>
+            <a:off x="2494915" y="5069840"/>
             <a:ext cx="1182370" cy="454660"/>
           </a:xfrm>
           <a:prstGeom prst="roundRect">
@@ -4437,7 +4392,7 @@
         </p:nvSpPr>
         <p:spPr>
           <a:xfrm>
-            <a:off x="2164715" y="3570605"/>
+            <a:off x="2111375" y="3570605"/>
             <a:ext cx="447040" cy="1608455"/>
           </a:xfrm>
           <a:prstGeom prst="rect">
@@ -4483,7 +4438,7 @@
         </p:nvCxnSpPr>
         <p:spPr>
           <a:xfrm>
-            <a:off x="3140075" y="3785870"/>
+            <a:off x="3086735" y="3785870"/>
             <a:ext cx="0" cy="439420"/>
           </a:xfrm>
           <a:prstGeom prst="straightConnector1">
@@ -4523,7 +4478,7 @@
         </p:nvCxnSpPr>
         <p:spPr>
           <a:xfrm>
-            <a:off x="3140075" y="4679315"/>
+            <a:off x="3086735" y="4679315"/>
             <a:ext cx="0" cy="389890"/>
           </a:xfrm>
           <a:prstGeom prst="straightConnector1">
@@ -4562,7 +4517,7 @@
         </p:nvCxnSpPr>
         <p:spPr>
           <a:xfrm rot="5400000" flipV="1">
-            <a:off x="-511175" y="2458085"/>
+            <a:off x="-564515" y="2458085"/>
             <a:ext cx="2230120" cy="321945"/>
           </a:xfrm>
           <a:prstGeom prst="bentConnector2">
@@ -4599,7 +4554,7 @@
         </p:nvCxnSpPr>
         <p:spPr>
           <a:xfrm rot="5400000" flipV="1">
-            <a:off x="-1162050" y="3131185"/>
+            <a:off x="-1215390" y="3131185"/>
             <a:ext cx="3542030" cy="329565"/>
           </a:xfrm>
           <a:prstGeom prst="bentConnector2">
@@ -4636,7 +4591,7 @@
         </p:nvSpPr>
         <p:spPr>
           <a:xfrm>
-            <a:off x="4757420" y="835660"/>
+            <a:off x="4704080" y="835660"/>
             <a:ext cx="1121410" cy="2663825"/>
           </a:xfrm>
           <a:prstGeom prst="rect">
@@ -4679,7 +4634,7 @@
         </p:nvSpPr>
         <p:spPr>
           <a:xfrm>
-            <a:off x="4838700" y="1333500"/>
+            <a:off x="4785360" y="1333500"/>
             <a:ext cx="944245" cy="262255"/>
           </a:xfrm>
           <a:prstGeom prst="roundRect">
@@ -4734,7 +4689,7 @@
         </p:nvSpPr>
         <p:spPr>
           <a:xfrm>
-            <a:off x="4838700" y="1687830"/>
+            <a:off x="4785360" y="1687830"/>
             <a:ext cx="944245" cy="262255"/>
           </a:xfrm>
           <a:prstGeom prst="roundRect">
@@ -4797,7 +4752,7 @@
         </p:nvSpPr>
         <p:spPr>
           <a:xfrm>
-            <a:off x="4838700" y="2039620"/>
+            <a:off x="4785360" y="2039620"/>
             <a:ext cx="944880" cy="262255"/>
           </a:xfrm>
           <a:prstGeom prst="roundRect">
@@ -4860,7 +4815,7 @@
         </p:nvSpPr>
         <p:spPr>
           <a:xfrm>
-            <a:off x="4838700" y="2381885"/>
+            <a:off x="4785360" y="2381885"/>
             <a:ext cx="944245" cy="262255"/>
           </a:xfrm>
           <a:prstGeom prst="roundRect">
@@ -4923,7 +4878,7 @@
         </p:nvSpPr>
         <p:spPr>
           <a:xfrm>
-            <a:off x="4838700" y="2743200"/>
+            <a:off x="4785360" y="2743200"/>
             <a:ext cx="944880" cy="262255"/>
           </a:xfrm>
           <a:prstGeom prst="roundRect">
@@ -4986,7 +4941,7 @@
         </p:nvSpPr>
         <p:spPr>
           <a:xfrm>
-            <a:off x="4838700" y="3092450"/>
+            <a:off x="4785360" y="3092450"/>
             <a:ext cx="944245" cy="262255"/>
           </a:xfrm>
           <a:prstGeom prst="roundRect">
@@ -5049,7 +5004,7 @@
         </p:nvSpPr>
         <p:spPr>
           <a:xfrm>
-            <a:off x="4876800" y="953135"/>
+            <a:off x="4823460" y="953135"/>
             <a:ext cx="964565" cy="307975"/>
           </a:xfrm>
           <a:prstGeom prst="rect">
@@ -5092,7 +5047,7 @@
         </p:nvSpPr>
         <p:spPr>
           <a:xfrm>
-            <a:off x="4757420" y="3785870"/>
+            <a:off x="4704080" y="3785870"/>
             <a:ext cx="1121410" cy="1820545"/>
           </a:xfrm>
           <a:prstGeom prst="rect">
@@ -5135,7 +5090,7 @@
         </p:nvSpPr>
         <p:spPr>
           <a:xfrm>
-            <a:off x="4838700" y="5161280"/>
+            <a:off x="4785360" y="5161280"/>
             <a:ext cx="964565" cy="262255"/>
           </a:xfrm>
           <a:prstGeom prst="roundRect">
@@ -5198,7 +5153,7 @@
         </p:nvSpPr>
         <p:spPr>
           <a:xfrm>
-            <a:off x="4876165" y="3917315"/>
+            <a:off x="4822825" y="3917315"/>
             <a:ext cx="964565" cy="307975"/>
           </a:xfrm>
           <a:prstGeom prst="rect">
@@ -5241,7 +5196,7 @@
         </p:nvSpPr>
         <p:spPr>
           <a:xfrm>
-            <a:off x="4829175" y="4312920"/>
+            <a:off x="4775835" y="4312920"/>
             <a:ext cx="974725" cy="568325"/>
           </a:xfrm>
           <a:prstGeom prst="roundRect">
@@ -5327,7 +5282,7 @@
         </p:nvCxnSpPr>
         <p:spPr>
           <a:xfrm>
-            <a:off x="3935095" y="1279525"/>
+            <a:off x="3881755" y="1279525"/>
             <a:ext cx="903605" cy="185420"/>
           </a:xfrm>
           <a:prstGeom prst="bentConnector3">
@@ -5369,7 +5324,7 @@
         </p:nvCxnSpPr>
         <p:spPr>
           <a:xfrm>
-            <a:off x="3935095" y="1279525"/>
+            <a:off x="3881755" y="1279525"/>
             <a:ext cx="903605" cy="539750"/>
           </a:xfrm>
           <a:prstGeom prst="bentConnector3">
@@ -5411,7 +5366,7 @@
         </p:nvCxnSpPr>
         <p:spPr>
           <a:xfrm>
-            <a:off x="3935095" y="1279525"/>
+            <a:off x="3881755" y="1279525"/>
             <a:ext cx="903605" cy="891540"/>
           </a:xfrm>
           <a:prstGeom prst="bentConnector3">
@@ -5453,7 +5408,7 @@
         </p:nvCxnSpPr>
         <p:spPr>
           <a:xfrm>
-            <a:off x="3935095" y="1279525"/>
+            <a:off x="3881755" y="1279525"/>
             <a:ext cx="903605" cy="1595120"/>
           </a:xfrm>
           <a:prstGeom prst="bentConnector3">
@@ -5495,7 +5450,7 @@
         </p:nvCxnSpPr>
         <p:spPr>
           <a:xfrm>
-            <a:off x="3935095" y="1279525"/>
+            <a:off x="3881755" y="1279525"/>
             <a:ext cx="903605" cy="1944370"/>
           </a:xfrm>
           <a:prstGeom prst="bentConnector3">
@@ -5534,7 +5489,7 @@
         </p:nvCxnSpPr>
         <p:spPr>
           <a:xfrm>
-            <a:off x="4011930" y="1278890"/>
+            <a:off x="3958590" y="1278890"/>
             <a:ext cx="735965" cy="3416935"/>
           </a:xfrm>
           <a:prstGeom prst="bentConnector3">
@@ -5575,7 +5530,7 @@
         </p:nvCxnSpPr>
         <p:spPr>
           <a:xfrm flipV="1">
-            <a:off x="4388485" y="2513330"/>
+            <a:off x="4335145" y="2513330"/>
             <a:ext cx="450215" cy="6350"/>
           </a:xfrm>
           <a:prstGeom prst="straightConnector1">
@@ -5615,7 +5570,7 @@
         </p:nvCxnSpPr>
         <p:spPr>
           <a:xfrm>
-            <a:off x="3730625" y="3558540"/>
+            <a:off x="3677285" y="3558540"/>
             <a:ext cx="1108075" cy="1734185"/>
           </a:xfrm>
           <a:prstGeom prst="bentConnector3">
@@ -5657,7 +5612,7 @@
         </p:nvCxnSpPr>
         <p:spPr>
           <a:xfrm flipV="1">
-            <a:off x="3730625" y="5292725"/>
+            <a:off x="3677285" y="5292725"/>
             <a:ext cx="1108075" cy="4445"/>
           </a:xfrm>
           <a:prstGeom prst="straightConnector1">
@@ -5697,7 +5652,7 @@
         </p:nvCxnSpPr>
         <p:spPr>
           <a:xfrm>
-            <a:off x="3730625" y="4452620"/>
+            <a:off x="3677285" y="4452620"/>
             <a:ext cx="1108075" cy="840105"/>
           </a:xfrm>
           <a:prstGeom prst="bentConnector3">
@@ -5734,7 +5689,7 @@
         </p:nvSpPr>
         <p:spPr>
           <a:xfrm>
-            <a:off x="6250940" y="832485"/>
+            <a:off x="6197600" y="832485"/>
             <a:ext cx="1370330" cy="4773295"/>
           </a:xfrm>
           <a:prstGeom prst="rect">
@@ -5777,7 +5732,7 @@
         </p:nvSpPr>
         <p:spPr>
           <a:xfrm>
-            <a:off x="6250940" y="2766695"/>
+            <a:off x="6197600" y="2766695"/>
             <a:ext cx="1370330" cy="958215"/>
           </a:xfrm>
           <a:prstGeom prst="rect">
@@ -5882,7 +5837,7 @@
         </p:nvCxnSpPr>
         <p:spPr>
           <a:xfrm>
-            <a:off x="5878830" y="2167890"/>
+            <a:off x="5825490" y="2167890"/>
             <a:ext cx="372110" cy="1051560"/>
           </a:xfrm>
           <a:prstGeom prst="bentConnector3">
@@ -5924,7 +5879,7 @@
         </p:nvCxnSpPr>
         <p:spPr>
           <a:xfrm flipV="1">
-            <a:off x="5878830" y="3219450"/>
+            <a:off x="5825490" y="3219450"/>
             <a:ext cx="372110" cy="1477010"/>
           </a:xfrm>
           <a:prstGeom prst="bentConnector3">
@@ -5963,7 +5918,7 @@
         </p:nvSpPr>
         <p:spPr>
           <a:xfrm>
-            <a:off x="8329295" y="832485"/>
+            <a:off x="8390255" y="832485"/>
             <a:ext cx="3722370" cy="2010410"/>
           </a:xfrm>
           <a:prstGeom prst="rect">
@@ -6006,7 +5961,7 @@
         </p:nvSpPr>
         <p:spPr>
           <a:xfrm>
-            <a:off x="8552815" y="1218565"/>
+            <a:off x="8613775" y="1218565"/>
             <a:ext cx="3298825" cy="392430"/>
           </a:xfrm>
           <a:prstGeom prst="roundRect">
@@ -6061,7 +6016,7 @@
         </p:nvSpPr>
         <p:spPr>
           <a:xfrm>
-            <a:off x="8552815" y="1778000"/>
+            <a:off x="8613775" y="1778000"/>
             <a:ext cx="3298825" cy="392430"/>
           </a:xfrm>
           <a:prstGeom prst="roundRect">
@@ -6116,7 +6071,7 @@
         </p:nvSpPr>
         <p:spPr>
           <a:xfrm>
-            <a:off x="8552815" y="2335530"/>
+            <a:off x="8613775" y="2335530"/>
             <a:ext cx="3298825" cy="392430"/>
           </a:xfrm>
           <a:prstGeom prst="roundRect">
@@ -6171,7 +6126,7 @@
         </p:nvSpPr>
         <p:spPr>
           <a:xfrm>
-            <a:off x="9451340" y="848360"/>
+            <a:off x="9512300" y="848360"/>
             <a:ext cx="2216785" cy="307975"/>
           </a:xfrm>
           <a:prstGeom prst="rect">
@@ -6214,7 +6169,7 @@
         </p:nvSpPr>
         <p:spPr>
           <a:xfrm>
-            <a:off x="8329295" y="3092450"/>
+            <a:off x="8390255" y="3092450"/>
             <a:ext cx="3722370" cy="1132840"/>
           </a:xfrm>
           <a:prstGeom prst="rect">
@@ -6257,7 +6212,7 @@
         </p:nvSpPr>
         <p:spPr>
           <a:xfrm>
-            <a:off x="9393555" y="3137535"/>
+            <a:off x="9454515" y="3137535"/>
             <a:ext cx="2216785" cy="307975"/>
           </a:xfrm>
           <a:prstGeom prst="rect">
@@ -6300,7 +6255,7 @@
         </p:nvSpPr>
         <p:spPr>
           <a:xfrm>
-            <a:off x="8426450" y="3500120"/>
+            <a:off x="8487410" y="3500120"/>
             <a:ext cx="1023620" cy="554355"/>
           </a:xfrm>
           <a:prstGeom prst="roundRect">
@@ -6369,7 +6324,7 @@
         </p:nvSpPr>
         <p:spPr>
           <a:xfrm>
-            <a:off x="9635490" y="3500120"/>
+            <a:off x="9696450" y="3500120"/>
             <a:ext cx="1051560" cy="554355"/>
           </a:xfrm>
           <a:prstGeom prst="roundRect">
@@ -6438,7 +6393,7 @@
         </p:nvSpPr>
         <p:spPr>
           <a:xfrm>
-            <a:off x="10894695" y="3500120"/>
+            <a:off x="10955655" y="3500120"/>
             <a:ext cx="1051560" cy="554355"/>
           </a:xfrm>
           <a:prstGeom prst="roundRect">
@@ -6515,7 +6470,7 @@
         </p:blipFill>
         <p:spPr>
           <a:xfrm>
-            <a:off x="9330690" y="4464050"/>
+            <a:off x="9391650" y="4464050"/>
             <a:ext cx="1723390" cy="1104265"/>
           </a:xfrm>
           <a:prstGeom prst="rect">
@@ -6531,7 +6486,7 @@
         </p:nvSpPr>
         <p:spPr>
           <a:xfrm>
-            <a:off x="9549130" y="5558155"/>
+            <a:off x="9610090" y="5558155"/>
             <a:ext cx="1786255" cy="307975"/>
           </a:xfrm>
           <a:prstGeom prst="rect">
@@ -6577,7 +6532,7 @@
         </p:nvCxnSpPr>
         <p:spPr>
           <a:xfrm>
-            <a:off x="10190480" y="2842895"/>
+            <a:off x="10251440" y="2842895"/>
             <a:ext cx="0" cy="249555"/>
           </a:xfrm>
           <a:prstGeom prst="straightConnector1">
@@ -6617,7 +6572,7 @@
         </p:nvCxnSpPr>
         <p:spPr>
           <a:xfrm>
-            <a:off x="10190480" y="4225290"/>
+            <a:off x="10251440" y="4225290"/>
             <a:ext cx="1905" cy="238760"/>
           </a:xfrm>
           <a:prstGeom prst="straightConnector1">
@@ -6653,9 +6608,9 @@
           <p:nvPr/>
         </p:nvCxnSpPr>
         <p:spPr>
-          <a:xfrm>
-            <a:off x="7846060" y="3339465"/>
-            <a:ext cx="346710" cy="0"/>
+          <a:xfrm flipV="1">
+            <a:off x="7959725" y="3339465"/>
+            <a:ext cx="286385" cy="3175"/>
           </a:xfrm>
           <a:prstGeom prst="straightConnector1">
             <a:avLst/>
@@ -6693,7 +6648,7 @@
             </p:nvSpPr>
             <p:spPr>
               <a:xfrm>
-                <a:off x="1640205" y="3366770"/>
+                <a:off x="1586865" y="3366770"/>
                 <a:ext cx="640080" cy="338455"/>
               </a:xfrm>
               <a:prstGeom prst="rect">
@@ -6760,7 +6715,7 @@
             </p:nvSpPr>
             <p:spPr>
               <a:xfrm>
-                <a:off x="1640205" y="3366770"/>
+                <a:off x="1586865" y="3366770"/>
                 <a:ext cx="640080" cy="338455"/>
               </a:xfrm>
               <a:prstGeom prst="rect">
@@ -6796,7 +6751,7 @@
         </p:nvSpPr>
         <p:spPr>
           <a:xfrm>
-            <a:off x="765175" y="4829175"/>
+            <a:off x="711835" y="4829175"/>
             <a:ext cx="953135" cy="467995"/>
           </a:xfrm>
           <a:prstGeom prst="roundRect">
@@ -6865,7 +6820,7 @@
         </p:nvCxnSpPr>
         <p:spPr>
           <a:xfrm flipV="1">
-            <a:off x="1736090" y="3719830"/>
+            <a:off x="1682750" y="3719830"/>
             <a:ext cx="402590" cy="3175"/>
           </a:xfrm>
           <a:prstGeom prst="straightConnector1">
@@ -6902,7 +6857,7 @@
         </p:nvCxnSpPr>
         <p:spPr>
           <a:xfrm flipV="1">
-            <a:off x="1718310" y="5073015"/>
+            <a:off x="1664970" y="5073015"/>
             <a:ext cx="402590" cy="3175"/>
           </a:xfrm>
           <a:prstGeom prst="straightConnector1">
@@ -6941,7 +6896,7 @@
             </p:nvSpPr>
             <p:spPr>
               <a:xfrm>
-                <a:off x="1657985" y="4732020"/>
+                <a:off x="1604645" y="4732020"/>
                 <a:ext cx="609600" cy="338455"/>
               </a:xfrm>
               <a:prstGeom prst="rect">
@@ -7008,7 +6963,7 @@
             </p:nvSpPr>
             <p:spPr>
               <a:xfrm>
-                <a:off x="1657985" y="4732020"/>
+                <a:off x="1604645" y="4732020"/>
                 <a:ext cx="609600" cy="338455"/>
               </a:xfrm>
               <a:prstGeom prst="rect">
@@ -7046,7 +7001,7 @@
             </p:nvSpPr>
             <p:spPr>
               <a:xfrm>
-                <a:off x="3126740" y="4692650"/>
+                <a:off x="3073400" y="4692650"/>
                 <a:ext cx="609600" cy="338455"/>
               </a:xfrm>
               <a:prstGeom prst="rect">
@@ -7113,7 +7068,7 @@
             </p:nvSpPr>
             <p:spPr>
               <a:xfrm>
-                <a:off x="3126740" y="4692650"/>
+                <a:off x="3073400" y="4692650"/>
                 <a:ext cx="609600" cy="338455"/>
               </a:xfrm>
               <a:prstGeom prst="rect">
@@ -7151,7 +7106,7 @@
             </p:nvSpPr>
             <p:spPr>
               <a:xfrm>
-                <a:off x="3154045" y="3832860"/>
+                <a:off x="3100705" y="3832860"/>
                 <a:ext cx="640080" cy="338455"/>
               </a:xfrm>
               <a:prstGeom prst="rect">
@@ -7218,7 +7173,7 @@
             </p:nvSpPr>
             <p:spPr>
               <a:xfrm>
-                <a:off x="3154045" y="3832860"/>
+                <a:off x="3100705" y="3832860"/>
                 <a:ext cx="640080" cy="338455"/>
               </a:xfrm>
               <a:prstGeom prst="rect">
